--- a/DEV-1-16/for_students/DAY-1/ppt/dev1_05.pptx
+++ b/DEV-1-16/for_students/DAY-1/ppt/dev1_05.pptx
@@ -269,7 +269,7 @@
           <a:p>
             <a:fld id="{EF790F8C-5FB9-4EFE-BCC7-F735A3026FD8}" type="datetimeFigureOut">
               <a:rPr lang="ru-RU" smtClean="0"/>
-              <a:t>19.09.2024</a:t>
+              <a:t>05.12.2025</a:t>
             </a:fld>
             <a:endParaRPr lang="ru-RU"/>
           </a:p>
@@ -467,7 +467,7 @@
           <a:p>
             <a:fld id="{EF790F8C-5FB9-4EFE-BCC7-F735A3026FD8}" type="datetimeFigureOut">
               <a:rPr lang="ru-RU" smtClean="0"/>
-              <a:t>19.09.2024</a:t>
+              <a:t>05.12.2025</a:t>
             </a:fld>
             <a:endParaRPr lang="ru-RU"/>
           </a:p>
@@ -675,7 +675,7 @@
           <a:p>
             <a:fld id="{EF790F8C-5FB9-4EFE-BCC7-F735A3026FD8}" type="datetimeFigureOut">
               <a:rPr lang="ru-RU" smtClean="0"/>
-              <a:t>19.09.2024</a:t>
+              <a:t>05.12.2025</a:t>
             </a:fld>
             <a:endParaRPr lang="ru-RU"/>
           </a:p>
@@ -1687,7 +1687,7 @@
           <a:p>
             <a:fld id="{EF790F8C-5FB9-4EFE-BCC7-F735A3026FD8}" type="datetimeFigureOut">
               <a:rPr lang="ru-RU" smtClean="0"/>
-              <a:t>19.09.2024</a:t>
+              <a:t>05.12.2025</a:t>
             </a:fld>
             <a:endParaRPr lang="ru-RU"/>
           </a:p>
@@ -2798,7 +2798,7 @@
           <a:p>
             <a:fld id="{EF790F8C-5FB9-4EFE-BCC7-F735A3026FD8}" type="datetimeFigureOut">
               <a:rPr lang="ru-RU" smtClean="0"/>
-              <a:t>19.09.2024</a:t>
+              <a:t>05.12.2025</a:t>
             </a:fld>
             <a:endParaRPr lang="ru-RU"/>
           </a:p>
@@ -3073,7 +3073,7 @@
           <a:p>
             <a:fld id="{EF790F8C-5FB9-4EFE-BCC7-F735A3026FD8}" type="datetimeFigureOut">
               <a:rPr lang="ru-RU" smtClean="0"/>
-              <a:t>19.09.2024</a:t>
+              <a:t>05.12.2025</a:t>
             </a:fld>
             <a:endParaRPr lang="ru-RU"/>
           </a:p>
@@ -3338,7 +3338,7 @@
           <a:p>
             <a:fld id="{EF790F8C-5FB9-4EFE-BCC7-F735A3026FD8}" type="datetimeFigureOut">
               <a:rPr lang="ru-RU" smtClean="0"/>
-              <a:t>19.09.2024</a:t>
+              <a:t>05.12.2025</a:t>
             </a:fld>
             <a:endParaRPr lang="ru-RU"/>
           </a:p>
@@ -3750,7 +3750,7 @@
           <a:p>
             <a:fld id="{EF790F8C-5FB9-4EFE-BCC7-F735A3026FD8}" type="datetimeFigureOut">
               <a:rPr lang="ru-RU" smtClean="0"/>
-              <a:t>19.09.2024</a:t>
+              <a:t>05.12.2025</a:t>
             </a:fld>
             <a:endParaRPr lang="ru-RU"/>
           </a:p>
@@ -3891,7 +3891,7 @@
           <a:p>
             <a:fld id="{EF790F8C-5FB9-4EFE-BCC7-F735A3026FD8}" type="datetimeFigureOut">
               <a:rPr lang="ru-RU" smtClean="0"/>
-              <a:t>19.09.2024</a:t>
+              <a:t>05.12.2025</a:t>
             </a:fld>
             <a:endParaRPr lang="ru-RU"/>
           </a:p>
@@ -4004,7 +4004,7 @@
           <a:p>
             <a:fld id="{EF790F8C-5FB9-4EFE-BCC7-F735A3026FD8}" type="datetimeFigureOut">
               <a:rPr lang="ru-RU" smtClean="0"/>
-              <a:t>19.09.2024</a:t>
+              <a:t>05.12.2025</a:t>
             </a:fld>
             <a:endParaRPr lang="ru-RU"/>
           </a:p>
@@ -4315,7 +4315,7 @@
           <a:p>
             <a:fld id="{EF790F8C-5FB9-4EFE-BCC7-F735A3026FD8}" type="datetimeFigureOut">
               <a:rPr lang="ru-RU" smtClean="0"/>
-              <a:t>19.09.2024</a:t>
+              <a:t>05.12.2025</a:t>
             </a:fld>
             <a:endParaRPr lang="ru-RU"/>
           </a:p>
@@ -4603,7 +4603,7 @@
           <a:p>
             <a:fld id="{EF790F8C-5FB9-4EFE-BCC7-F735A3026FD8}" type="datetimeFigureOut">
               <a:rPr lang="ru-RU" smtClean="0"/>
-              <a:t>19.09.2024</a:t>
+              <a:t>05.12.2025</a:t>
             </a:fld>
             <a:endParaRPr lang="ru-RU"/>
           </a:p>
@@ -4844,7 +4844,7 @@
           <a:p>
             <a:fld id="{EF790F8C-5FB9-4EFE-BCC7-F735A3026FD8}" type="datetimeFigureOut">
               <a:rPr lang="ru-RU" smtClean="0"/>
-              <a:t>19.09.2024</a:t>
+              <a:t>05.12.2025</a:t>
             </a:fld>
             <a:endParaRPr lang="ru-RU"/>
           </a:p>
@@ -6006,7 +6006,7 @@
 </file>
 
 <file path=ppt/slides/slide1.xml><?xml version="1.0" encoding="utf-8"?>
-<p:sld xmlns:a="http://schemas.openxmlformats.org/drawingml/2006/main" xmlns:r="http://schemas.openxmlformats.org/officeDocument/2006/relationships" xmlns:p="http://schemas.openxmlformats.org/presentationml/2006/main">
+<p:sld xmlns:a="http://schemas.openxmlformats.org/drawingml/2006/main" xmlns:r="http://schemas.openxmlformats.org/officeDocument/2006/relationships" xmlns:p="http://schemas.openxmlformats.org/presentationml/2006/main" showMasterSp="0">
   <p:cSld>
     <p:spTree>
       <p:nvGrpSpPr>
